--- a/data-eng/decks/w6d2s3.pptx
+++ b/data-eng/decks/w6d2s3.pptx
@@ -3099,7 +3099,7 @@
       <p:grpSpPr/>
       <p:sp>
         <p:nvSpPr>
-          <p:cNvPr id="2" name="Oval 1"/>
+          <p:cNvPr id="2" name="deckgen:decor"/>
           <p:cNvSpPr/>
           <p:nvPr/>
         </p:nvSpPr>
@@ -3129,7 +3129,7 @@
       </p:sp>
       <p:sp>
         <p:nvSpPr>
-          <p:cNvPr id="3" name="Oval 2"/>
+          <p:cNvPr id="3" name="deckgen:decor"/>
           <p:cNvSpPr/>
           <p:nvPr/>
         </p:nvSpPr>
@@ -3159,7 +3159,7 @@
       </p:sp>
       <p:sp>
         <p:nvSpPr>
-          <p:cNvPr id="4" name="Oval 3"/>
+          <p:cNvPr id="4" name="deckgen:decor"/>
           <p:cNvSpPr/>
           <p:nvPr/>
         </p:nvSpPr>
@@ -3189,7 +3189,7 @@
       </p:sp>
       <p:sp>
         <p:nvSpPr>
-          <p:cNvPr id="5" name="Rectangle 4"/>
+          <p:cNvPr id="5" name="deckgen:decor"/>
           <p:cNvSpPr/>
           <p:nvPr/>
         </p:nvSpPr>
@@ -3219,7 +3219,7 @@
       </p:sp>
       <p:sp>
         <p:nvSpPr>
-          <p:cNvPr id="6" name="Oval 5"/>
+          <p:cNvPr id="6" name="deckgen:decor"/>
           <p:cNvSpPr/>
           <p:nvPr/>
         </p:nvSpPr>
@@ -3249,7 +3249,7 @@
       </p:sp>
       <p:sp>
         <p:nvSpPr>
-          <p:cNvPr id="7" name="Oval 6"/>
+          <p:cNvPr id="7" name="deckgen:decor"/>
           <p:cNvSpPr/>
           <p:nvPr/>
         </p:nvSpPr>
@@ -3279,7 +3279,7 @@
       </p:sp>
       <p:sp>
         <p:nvSpPr>
-          <p:cNvPr id="8" name="Oval 7"/>
+          <p:cNvPr id="8" name="deckgen:decor"/>
           <p:cNvSpPr/>
           <p:nvPr/>
         </p:nvSpPr>
@@ -3309,7 +3309,7 @@
       </p:sp>
       <p:sp>
         <p:nvSpPr>
-          <p:cNvPr id="9" name="Oval 8"/>
+          <p:cNvPr id="9" name="deckgen:decor"/>
           <p:cNvSpPr/>
           <p:nvPr/>
         </p:nvSpPr>
@@ -3339,7 +3339,7 @@
       </p:sp>
       <p:sp>
         <p:nvSpPr>
-          <p:cNvPr id="10" name="Rectangle 9"/>
+          <p:cNvPr id="10" name="deckgen:decor"/>
           <p:cNvSpPr/>
           <p:nvPr/>
         </p:nvSpPr>
@@ -3599,7 +3599,7 @@
       <p:grpSpPr/>
       <p:sp>
         <p:nvSpPr>
-          <p:cNvPr id="2" name="Oval 1"/>
+          <p:cNvPr id="2" name="deckgen:decor"/>
           <p:cNvSpPr/>
           <p:nvPr/>
         </p:nvSpPr>
@@ -3629,7 +3629,7 @@
       </p:sp>
       <p:sp>
         <p:nvSpPr>
-          <p:cNvPr id="3" name="Oval 2"/>
+          <p:cNvPr id="3" name="deckgen:decor"/>
           <p:cNvSpPr/>
           <p:nvPr/>
         </p:nvSpPr>
@@ -3852,7 +3852,7 @@
         </p:nvSpPr>
         <p:spPr>
           <a:xfrm>
-            <a:off x="1428750" y="5486400"/>
+            <a:off x="1428750" y="5476875"/>
             <a:ext cx="419100" cy="381000"/>
           </a:xfrm>
           <a:prstGeom prst="rect">
@@ -3893,7 +3893,7 @@
         </p:nvSpPr>
         <p:spPr>
           <a:xfrm>
-            <a:off x="1905000" y="5486400"/>
+            <a:off x="1905000" y="5476875"/>
             <a:ext cx="6724650" cy="381000"/>
           </a:xfrm>
           <a:prstGeom prst="rect">
@@ -3968,7 +3968,7 @@
         </p:nvSpPr>
         <p:spPr>
           <a:xfrm>
-            <a:off x="9658350" y="5486400"/>
+            <a:off x="9658350" y="5476875"/>
             <a:ext cx="419100" cy="381000"/>
           </a:xfrm>
           <a:prstGeom prst="rect">
@@ -4009,7 +4009,7 @@
         </p:nvSpPr>
         <p:spPr>
           <a:xfrm>
-            <a:off x="10134600" y="5486400"/>
+            <a:off x="10134600" y="5476875"/>
             <a:ext cx="6724650" cy="381000"/>
           </a:xfrm>
           <a:prstGeom prst="rect">
@@ -4084,7 +4084,7 @@
         </p:nvSpPr>
         <p:spPr>
           <a:xfrm>
-            <a:off x="1428750" y="6515100"/>
+            <a:off x="1428750" y="6505575"/>
             <a:ext cx="419100" cy="381000"/>
           </a:xfrm>
           <a:prstGeom prst="rect">
@@ -4125,7 +4125,7 @@
         </p:nvSpPr>
         <p:spPr>
           <a:xfrm>
-            <a:off x="1905000" y="6515100"/>
+            <a:off x="1905000" y="6505575"/>
             <a:ext cx="6724650" cy="381000"/>
           </a:xfrm>
           <a:prstGeom prst="rect">
@@ -4200,7 +4200,7 @@
         </p:nvSpPr>
         <p:spPr>
           <a:xfrm>
-            <a:off x="9658350" y="6515100"/>
+            <a:off x="9658350" y="6505575"/>
             <a:ext cx="419100" cy="381000"/>
           </a:xfrm>
           <a:prstGeom prst="rect">
@@ -4241,7 +4241,7 @@
         </p:nvSpPr>
         <p:spPr>
           <a:xfrm>
-            <a:off x="10134600" y="6515100"/>
+            <a:off x="10134600" y="6505575"/>
             <a:ext cx="6724650" cy="381000"/>
           </a:xfrm>
           <a:prstGeom prst="rect">
@@ -4406,7 +4406,7 @@
       <p:grpSpPr/>
       <p:sp>
         <p:nvSpPr>
-          <p:cNvPr id="2" name="Oval 1"/>
+          <p:cNvPr id="2" name="deckgen:decor"/>
           <p:cNvSpPr/>
           <p:nvPr/>
         </p:nvSpPr>
@@ -4436,7 +4436,7 @@
       </p:sp>
       <p:sp>
         <p:nvSpPr>
-          <p:cNvPr id="3" name="Oval 2"/>
+          <p:cNvPr id="3" name="deckgen:decor"/>
           <p:cNvSpPr/>
           <p:nvPr/>
         </p:nvSpPr>
@@ -4466,7 +4466,7 @@
       </p:sp>
       <p:sp>
         <p:nvSpPr>
-          <p:cNvPr id="4" name="Oval 3"/>
+          <p:cNvPr id="4" name="deckgen:decor"/>
           <p:cNvSpPr/>
           <p:nvPr/>
         </p:nvSpPr>
@@ -5039,7 +5039,7 @@
                 <a:ea typeface="Pretendard"/>
                 <a:cs typeface="Pretendard"/>
               </a:rPr>
-              <a:t>자주 겪는 오류 네 가지의 원인과 해결을 안다</a:t>
+              <a:t>자주 겪는 오류 다섯 가지의 원인과 해결을 안다</a:t>
             </a:r>
           </a:p>
         </p:txBody>
@@ -5397,7 +5397,7 @@
       <p:grpSpPr/>
       <p:sp>
         <p:nvSpPr>
-          <p:cNvPr id="2" name="Oval 1"/>
+          <p:cNvPr id="2" name="deckgen:decor"/>
           <p:cNvSpPr/>
           <p:nvPr/>
         </p:nvSpPr>
@@ -5427,7 +5427,7 @@
       </p:sp>
       <p:sp>
         <p:nvSpPr>
-          <p:cNvPr id="3" name="Oval 2"/>
+          <p:cNvPr id="3" name="deckgen:decor"/>
           <p:cNvSpPr/>
           <p:nvPr/>
         </p:nvSpPr>
@@ -5457,7 +5457,7 @@
       </p:sp>
       <p:sp>
         <p:nvSpPr>
-          <p:cNvPr id="4" name="Oval 3"/>
+          <p:cNvPr id="4" name="deckgen:decor"/>
           <p:cNvSpPr/>
           <p:nvPr/>
         </p:nvSpPr>
@@ -7333,7 +7333,7 @@
       <p:grpSpPr/>
       <p:sp>
         <p:nvSpPr>
-          <p:cNvPr id="2" name="Oval 1"/>
+          <p:cNvPr id="2" name="deckgen:decor"/>
           <p:cNvSpPr/>
           <p:nvPr/>
         </p:nvSpPr>
@@ -7363,7 +7363,7 @@
       </p:sp>
       <p:sp>
         <p:nvSpPr>
-          <p:cNvPr id="3" name="Oval 2"/>
+          <p:cNvPr id="3" name="deckgen:decor"/>
           <p:cNvSpPr/>
           <p:nvPr/>
         </p:nvSpPr>
@@ -7393,7 +7393,7 @@
       </p:sp>
       <p:sp>
         <p:nvSpPr>
-          <p:cNvPr id="4" name="Oval 3"/>
+          <p:cNvPr id="4" name="deckgen:decor"/>
           <p:cNvSpPr/>
           <p:nvPr/>
         </p:nvSpPr>
@@ -9494,7 +9494,7 @@
       <p:grpSpPr/>
       <p:sp>
         <p:nvSpPr>
-          <p:cNvPr id="2" name="Oval 1"/>
+          <p:cNvPr id="2" name="deckgen:decor"/>
           <p:cNvSpPr/>
           <p:nvPr/>
         </p:nvSpPr>
@@ -9524,7 +9524,7 @@
       </p:sp>
       <p:sp>
         <p:nvSpPr>
-          <p:cNvPr id="3" name="Oval 2"/>
+          <p:cNvPr id="3" name="deckgen:decor"/>
           <p:cNvSpPr/>
           <p:nvPr/>
         </p:nvSpPr>
@@ -9554,7 +9554,7 @@
       </p:sp>
       <p:sp>
         <p:nvSpPr>
-          <p:cNvPr id="4" name="Oval 3"/>
+          <p:cNvPr id="4" name="deckgen:decor"/>
           <p:cNvSpPr/>
           <p:nvPr/>
         </p:nvSpPr>
@@ -10994,7 +10994,7 @@
       <p:grpSpPr/>
       <p:sp>
         <p:nvSpPr>
-          <p:cNvPr id="2" name="Oval 1"/>
+          <p:cNvPr id="2" name="deckgen:decor"/>
           <p:cNvSpPr/>
           <p:nvPr/>
         </p:nvSpPr>
@@ -11024,7 +11024,7 @@
       </p:sp>
       <p:sp>
         <p:nvSpPr>
-          <p:cNvPr id="3" name="Oval 2"/>
+          <p:cNvPr id="3" name="deckgen:decor"/>
           <p:cNvSpPr/>
           <p:nvPr/>
         </p:nvSpPr>
@@ -11054,7 +11054,7 @@
       </p:sp>
       <p:sp>
         <p:nvSpPr>
-          <p:cNvPr id="4" name="Oval 3"/>
+          <p:cNvPr id="4" name="deckgen:decor"/>
           <p:cNvSpPr/>
           <p:nvPr/>
         </p:nvSpPr>
@@ -12035,7 +12035,7 @@
                 <a:ea typeface="Pretendard"/>
                 <a:cs typeface="Pretendard"/>
               </a:rPr>
-              <a:t>설정을 고쳤는데</a:t>
+              <a:t>Conflict. The container</a:t>
             </a:r>
           </a:p>
           <a:p>
@@ -12053,7 +12053,7 @@
                 <a:ea typeface="Pretendard"/>
                 <a:cs typeface="Pretendard"/>
               </a:rPr>
-              <a:t>반영이 안 된 듯</a:t>
+              <a:t>name "/kafka" …</a:t>
             </a:r>
           </a:p>
         </p:txBody>
@@ -12128,7 +12128,7 @@
                 <a:ea typeface="Pretendard"/>
                 <a:cs typeface="Pretendard"/>
               </a:rPr>
-              <a:t>환경변수 오타(KAFKA_ 누락)</a:t>
+              <a:t>6-1 에서 docker run 으로</a:t>
             </a:r>
           </a:p>
           <a:p>
@@ -12146,7 +12146,7 @@
                 <a:ea typeface="Pretendard"/>
                 <a:cs typeface="Pretendard"/>
               </a:rPr>
-              <a:t>또는 컨테이너 재생성 안 됨</a:t>
+              <a:t>만든 kafka 가 남음</a:t>
             </a:r>
           </a:p>
         </p:txBody>
@@ -12221,7 +12221,7 @@
                 <a:ea typeface="Pretendard"/>
                 <a:cs typeface="Pretendard"/>
               </a:rPr>
-              <a:t>up -d --force-recreate ·</a:t>
+              <a:t>docker rm -fv kafka →</a:t>
             </a:r>
           </a:p>
           <a:p>
@@ -12239,7 +12239,7 @@
                 <a:ea typeface="Pretendard"/>
                 <a:cs typeface="Pretendard"/>
               </a:rPr>
-              <a:t>docker exec kafka env</a:t>
+              <a:t>다시 up -d</a:t>
             </a:r>
           </a:p>
         </p:txBody>
@@ -12314,7 +12314,7 @@
                 <a:ea typeface="Pretendard"/>
                 <a:cs typeface="Pretendard"/>
               </a:rPr>
-              <a:t>컨슈머 일부가</a:t>
+              <a:t>설정을 고쳤는데</a:t>
             </a:r>
           </a:p>
           <a:p>
@@ -12332,7 +12332,7 @@
                 <a:ea typeface="Pretendard"/>
                 <a:cs typeface="Pretendard"/>
               </a:rPr>
-              <a:t>아무것도 못 받음</a:t>
+              <a:t>반영이 안 된 듯</a:t>
             </a:r>
           </a:p>
         </p:txBody>
@@ -12407,7 +12407,7 @@
                 <a:ea typeface="Pretendard"/>
                 <a:cs typeface="Pretendard"/>
               </a:rPr>
-              <a:t>파티션보다 컨슈머가 많다</a:t>
+              <a:t>환경변수 오타(KAFKA_ 누락)</a:t>
             </a:r>
           </a:p>
           <a:p>
@@ -12425,7 +12425,7 @@
                 <a:ea typeface="Pretendard"/>
                 <a:cs typeface="Pretendard"/>
               </a:rPr>
-              <a:t>— 남는 쪽은 논다</a:t>
+              <a:t>또는 컨테이너 재생성 안 됨</a:t>
             </a:r>
           </a:p>
         </p:txBody>
@@ -12500,6 +12500,285 @@
                 <a:ea typeface="Pretendard"/>
                 <a:cs typeface="Pretendard"/>
               </a:rPr>
+              <a:t>up -d --force-recreate ·</a:t>
+            </a:r>
+          </a:p>
+          <a:p>
+            <a:pPr algn="ctr">
+              <a:lnSpc>
+                <a:spcPct val="115000"/>
+              </a:lnSpc>
+            </a:pPr>
+            <a:r>
+              <a:rPr sz="1875" b="0">
+                <a:solidFill>
+                  <a:srgbClr val="3D3D3D"/>
+                </a:solidFill>
+                <a:latin typeface="Pretendard"/>
+                <a:ea typeface="Pretendard"/>
+                <a:cs typeface="Pretendard"/>
+              </a:rPr>
+              <a:t>docker exec kafka env</a:t>
+            </a:r>
+          </a:p>
+        </p:txBody>
+      </p:sp>
+      <p:sp>
+        <p:nvSpPr>
+          <p:cNvPr id="38" name="Rounded Rectangle 37"/>
+          <p:cNvSpPr/>
+          <p:nvPr/>
+        </p:nvSpPr>
+        <p:spPr>
+          <a:xfrm>
+            <a:off x="1143000" y="6343650"/>
+            <a:ext cx="4762500" cy="647700"/>
+          </a:xfrm>
+          <a:prstGeom prst="roundRect">
+            <a:avLst>
+              <a:gd name="adj" fmla="val 5882"/>
+            </a:avLst>
+          </a:prstGeom>
+          <a:solidFill>
+            <a:srgbClr val="EDF3FD"/>
+          </a:solidFill>
+          <a:ln w="9525">
+            <a:solidFill>
+              <a:srgbClr val="BFD3F5"/>
+            </a:solidFill>
+          </a:ln>
+          <a:effectLst/>
+        </p:spPr>
+        <p:txBody>
+          <a:bodyPr rtlCol="0" anchor="ctr" wrap="square"/>
+          <a:lstStyle/>
+          <a:p>
+            <a:pPr algn="ctr"/>
+          </a:p>
+        </p:txBody>
+      </p:sp>
+      <p:sp>
+        <p:nvSpPr>
+          <p:cNvPr id="39" name="TextBox 38"/>
+          <p:cNvSpPr txBox="1"/>
+          <p:nvPr/>
+        </p:nvSpPr>
+        <p:spPr>
+          <a:xfrm>
+            <a:off x="1238250" y="6343650"/>
+            <a:ext cx="4572000" cy="647700"/>
+          </a:xfrm>
+          <a:prstGeom prst="rect">
+            <a:avLst/>
+          </a:prstGeom>
+          <a:noFill/>
+        </p:spPr>
+        <p:txBody>
+          <a:bodyPr wrap="square" lIns="0" rIns="0" tIns="0" bIns="0" anchor="ctr">
+            <a:spAutoFit/>
+          </a:bodyPr>
+          <a:lstStyle/>
+          <a:p>
+            <a:pPr algn="l">
+              <a:lnSpc>
+                <a:spcPct val="115000"/>
+              </a:lnSpc>
+            </a:pPr>
+            <a:r>
+              <a:rPr sz="1875" b="1">
+                <a:solidFill>
+                  <a:srgbClr val="0D2B5E"/>
+                </a:solidFill>
+                <a:latin typeface="Pretendard"/>
+                <a:ea typeface="Pretendard"/>
+                <a:cs typeface="Pretendard"/>
+              </a:rPr>
+              <a:t>컨슈머 일부가</a:t>
+            </a:r>
+          </a:p>
+          <a:p>
+            <a:pPr algn="l">
+              <a:lnSpc>
+                <a:spcPct val="115000"/>
+              </a:lnSpc>
+            </a:pPr>
+            <a:r>
+              <a:rPr sz="1875" b="1">
+                <a:solidFill>
+                  <a:srgbClr val="0D2B5E"/>
+                </a:solidFill>
+                <a:latin typeface="Pretendard"/>
+                <a:ea typeface="Pretendard"/>
+                <a:cs typeface="Pretendard"/>
+              </a:rPr>
+              <a:t>아무것도 못 받음</a:t>
+            </a:r>
+          </a:p>
+        </p:txBody>
+      </p:sp>
+      <p:sp>
+        <p:nvSpPr>
+          <p:cNvPr id="40" name="Rounded Rectangle 39"/>
+          <p:cNvSpPr/>
+          <p:nvPr/>
+        </p:nvSpPr>
+        <p:spPr>
+          <a:xfrm>
+            <a:off x="5943600" y="6343650"/>
+            <a:ext cx="5562600" cy="647700"/>
+          </a:xfrm>
+          <a:prstGeom prst="roundRect">
+            <a:avLst>
+              <a:gd name="adj" fmla="val 5882"/>
+            </a:avLst>
+          </a:prstGeom>
+          <a:solidFill>
+            <a:srgbClr val="FAFBFD"/>
+          </a:solidFill>
+          <a:ln w="9525">
+            <a:solidFill>
+              <a:srgbClr val="DCE1E8"/>
+            </a:solidFill>
+          </a:ln>
+          <a:effectLst/>
+        </p:spPr>
+        <p:txBody>
+          <a:bodyPr rtlCol="0" anchor="ctr" wrap="square"/>
+          <a:lstStyle/>
+          <a:p>
+            <a:pPr algn="ctr"/>
+          </a:p>
+        </p:txBody>
+      </p:sp>
+      <p:sp>
+        <p:nvSpPr>
+          <p:cNvPr id="41" name="TextBox 40"/>
+          <p:cNvSpPr txBox="1"/>
+          <p:nvPr/>
+        </p:nvSpPr>
+        <p:spPr>
+          <a:xfrm>
+            <a:off x="6038850" y="6343650"/>
+            <a:ext cx="5372100" cy="647700"/>
+          </a:xfrm>
+          <a:prstGeom prst="rect">
+            <a:avLst/>
+          </a:prstGeom>
+          <a:noFill/>
+        </p:spPr>
+        <p:txBody>
+          <a:bodyPr wrap="square" lIns="0" rIns="0" tIns="0" bIns="0" anchor="ctr">
+            <a:spAutoFit/>
+          </a:bodyPr>
+          <a:lstStyle/>
+          <a:p>
+            <a:pPr algn="ctr">
+              <a:lnSpc>
+                <a:spcPct val="115000"/>
+              </a:lnSpc>
+            </a:pPr>
+            <a:r>
+              <a:rPr sz="1875" b="0">
+                <a:solidFill>
+                  <a:srgbClr val="3D3D3D"/>
+                </a:solidFill>
+                <a:latin typeface="Pretendard"/>
+                <a:ea typeface="Pretendard"/>
+                <a:cs typeface="Pretendard"/>
+              </a:rPr>
+              <a:t>파티션보다 컨슈머가 많다</a:t>
+            </a:r>
+          </a:p>
+          <a:p>
+            <a:pPr algn="ctr">
+              <a:lnSpc>
+                <a:spcPct val="115000"/>
+              </a:lnSpc>
+            </a:pPr>
+            <a:r>
+              <a:rPr sz="1875" b="0">
+                <a:solidFill>
+                  <a:srgbClr val="3D3D3D"/>
+                </a:solidFill>
+                <a:latin typeface="Pretendard"/>
+                <a:ea typeface="Pretendard"/>
+                <a:cs typeface="Pretendard"/>
+              </a:rPr>
+              <a:t>— 남는 쪽은 논다</a:t>
+            </a:r>
+          </a:p>
+        </p:txBody>
+      </p:sp>
+      <p:sp>
+        <p:nvSpPr>
+          <p:cNvPr id="42" name="Rounded Rectangle 41"/>
+          <p:cNvSpPr/>
+          <p:nvPr/>
+        </p:nvSpPr>
+        <p:spPr>
+          <a:xfrm>
+            <a:off x="11544300" y="6343650"/>
+            <a:ext cx="5600700" cy="647700"/>
+          </a:xfrm>
+          <a:prstGeom prst="roundRect">
+            <a:avLst>
+              <a:gd name="adj" fmla="val 5882"/>
+            </a:avLst>
+          </a:prstGeom>
+          <a:solidFill>
+            <a:srgbClr val="FAFBFD"/>
+          </a:solidFill>
+          <a:ln w="9525">
+            <a:solidFill>
+              <a:srgbClr val="DCE1E8"/>
+            </a:solidFill>
+          </a:ln>
+          <a:effectLst/>
+        </p:spPr>
+        <p:txBody>
+          <a:bodyPr rtlCol="0" anchor="ctr" wrap="square"/>
+          <a:lstStyle/>
+          <a:p>
+            <a:pPr algn="ctr"/>
+          </a:p>
+        </p:txBody>
+      </p:sp>
+      <p:sp>
+        <p:nvSpPr>
+          <p:cNvPr id="43" name="TextBox 42"/>
+          <p:cNvSpPr txBox="1"/>
+          <p:nvPr/>
+        </p:nvSpPr>
+        <p:spPr>
+          <a:xfrm>
+            <a:off x="11639550" y="6343650"/>
+            <a:ext cx="5410200" cy="647700"/>
+          </a:xfrm>
+          <a:prstGeom prst="rect">
+            <a:avLst/>
+          </a:prstGeom>
+          <a:noFill/>
+        </p:spPr>
+        <p:txBody>
+          <a:bodyPr wrap="square" lIns="0" rIns="0" tIns="0" bIns="0" anchor="ctr">
+            <a:spAutoFit/>
+          </a:bodyPr>
+          <a:lstStyle/>
+          <a:p>
+            <a:pPr algn="ctr">
+              <a:lnSpc>
+                <a:spcPct val="115000"/>
+              </a:lnSpc>
+            </a:pPr>
+            <a:r>
+              <a:rPr sz="1875" b="0">
+                <a:solidFill>
+                  <a:srgbClr val="3D3D3D"/>
+                </a:solidFill>
+                <a:latin typeface="Pretendard"/>
+                <a:ea typeface="Pretendard"/>
+                <a:cs typeface="Pretendard"/>
+              </a:rPr>
               <a:t>--alter --partitions N 으로</a:t>
             </a:r>
           </a:p>
@@ -12525,7 +12804,7 @@
       </p:sp>
       <p:sp>
         <p:nvSpPr>
-          <p:cNvPr id="38" name="TextBox 37"/>
+          <p:cNvPr id="44" name="TextBox 43"/>
           <p:cNvSpPr txBox="1"/>
           <p:nvPr/>
         </p:nvSpPr>
@@ -12566,7 +12845,7 @@
       </p:sp>
       <p:sp>
         <p:nvSpPr>
-          <p:cNvPr id="39" name="Rectangle 38"/>
+          <p:cNvPr id="45" name="Rectangle 44"/>
           <p:cNvSpPr/>
           <p:nvPr/>
         </p:nvSpPr>
@@ -12596,7 +12875,7 @@
       </p:sp>
       <p:sp>
         <p:nvSpPr>
-          <p:cNvPr id="40" name="TextBox 39"/>
+          <p:cNvPr id="46" name="TextBox 45"/>
           <p:cNvSpPr txBox="1"/>
           <p:nvPr/>
         </p:nvSpPr>
@@ -12637,7 +12916,7 @@
       </p:sp>
       <p:sp>
         <p:nvSpPr>
-          <p:cNvPr id="41" name="TextBox 40"/>
+          <p:cNvPr id="47" name="TextBox 46"/>
           <p:cNvSpPr txBox="1"/>
           <p:nvPr/>
         </p:nvSpPr>
@@ -12696,7 +12975,7 @@
       <p:grpSpPr/>
       <p:sp>
         <p:nvSpPr>
-          <p:cNvPr id="2" name="Oval 1"/>
+          <p:cNvPr id="2" name="deckgen:decor"/>
           <p:cNvSpPr/>
           <p:nvPr/>
         </p:nvSpPr>
@@ -12726,7 +13005,7 @@
       </p:sp>
       <p:sp>
         <p:nvSpPr>
-          <p:cNvPr id="3" name="Oval 2"/>
+          <p:cNvPr id="3" name="deckgen:decor"/>
           <p:cNvSpPr/>
           <p:nvPr/>
         </p:nvSpPr>
@@ -12756,7 +13035,7 @@
       </p:sp>
       <p:sp>
         <p:nvSpPr>
-          <p:cNvPr id="4" name="Oval 3"/>
+          <p:cNvPr id="4" name="deckgen:decor"/>
           <p:cNvSpPr/>
           <p:nvPr/>
         </p:nvSpPr>
@@ -13816,7 +14095,7 @@
       <p:grpSpPr/>
       <p:sp>
         <p:nvSpPr>
-          <p:cNvPr id="2" name="Oval 1"/>
+          <p:cNvPr id="2" name="deckgen:decor"/>
           <p:cNvSpPr/>
           <p:nvPr/>
         </p:nvSpPr>
@@ -13846,7 +14125,7 @@
       </p:sp>
       <p:sp>
         <p:nvSpPr>
-          <p:cNvPr id="3" name="Oval 2"/>
+          <p:cNvPr id="3" name="deckgen:decor"/>
           <p:cNvSpPr/>
           <p:nvPr/>
         </p:nvSpPr>
@@ -13876,7 +14155,7 @@
       </p:sp>
       <p:sp>
         <p:nvSpPr>
-          <p:cNvPr id="4" name="Oval 3"/>
+          <p:cNvPr id="4" name="deckgen:decor"/>
           <p:cNvSpPr/>
           <p:nvPr/>
         </p:nvSpPr>
@@ -14025,7 +14304,7 @@
         <p:spPr>
           <a:xfrm>
             <a:off x="1143000" y="2781300"/>
-            <a:ext cx="1783687" cy="571500"/>
+            <a:ext cx="2685086" cy="571500"/>
           </a:xfrm>
           <a:prstGeom prst="rect">
             <a:avLst/>
@@ -14055,7 +14334,7 @@
         <p:spPr>
           <a:xfrm>
             <a:off x="1143000" y="2781300"/>
-            <a:ext cx="1783687" cy="571500"/>
+            <a:ext cx="2685086" cy="571500"/>
           </a:xfrm>
           <a:prstGeom prst="rect">
             <a:avLst/>
@@ -14095,8 +14374,8 @@
         </p:nvSpPr>
         <p:spPr>
           <a:xfrm>
-            <a:off x="2926687" y="2781300"/>
-            <a:ext cx="14218313" cy="571500"/>
+            <a:off x="3828086" y="2781300"/>
+            <a:ext cx="13316914" cy="571500"/>
           </a:xfrm>
           <a:prstGeom prst="rect">
             <a:avLst/>
@@ -14127,8 +14406,8 @@
         </p:nvSpPr>
         <p:spPr>
           <a:xfrm>
-            <a:off x="3079087" y="2781300"/>
-            <a:ext cx="13913513" cy="571500"/>
+            <a:off x="3980486" y="2781300"/>
+            <a:ext cx="13012114" cy="571500"/>
           </a:xfrm>
           <a:prstGeom prst="rect">
             <a:avLst/>
@@ -14169,7 +14448,7 @@
         <p:spPr>
           <a:xfrm>
             <a:off x="1143000" y="3429000"/>
-            <a:ext cx="1783687" cy="571500"/>
+            <a:ext cx="2685086" cy="571500"/>
           </a:xfrm>
           <a:prstGeom prst="rect">
             <a:avLst/>
@@ -14199,7 +14478,7 @@
         <p:spPr>
           <a:xfrm>
             <a:off x="1143000" y="3429000"/>
-            <a:ext cx="1783687" cy="571500"/>
+            <a:ext cx="2685086" cy="571500"/>
           </a:xfrm>
           <a:prstGeom prst="rect">
             <a:avLst/>
@@ -14239,8 +14518,8 @@
         </p:nvSpPr>
         <p:spPr>
           <a:xfrm>
-            <a:off x="2926687" y="3429000"/>
-            <a:ext cx="14218313" cy="571500"/>
+            <a:off x="3828086" y="3429000"/>
+            <a:ext cx="13316914" cy="571500"/>
           </a:xfrm>
           <a:prstGeom prst="rect">
             <a:avLst/>
@@ -14271,8 +14550,8 @@
         </p:nvSpPr>
         <p:spPr>
           <a:xfrm>
-            <a:off x="3079087" y="3429000"/>
-            <a:ext cx="13913513" cy="571500"/>
+            <a:off x="3980486" y="3429000"/>
+            <a:ext cx="13012114" cy="571500"/>
           </a:xfrm>
           <a:prstGeom prst="rect">
             <a:avLst/>
@@ -14313,7 +14592,7 @@
         <p:spPr>
           <a:xfrm>
             <a:off x="1143000" y="4076700"/>
-            <a:ext cx="1783687" cy="571500"/>
+            <a:ext cx="2685086" cy="571500"/>
           </a:xfrm>
           <a:prstGeom prst="rect">
             <a:avLst/>
@@ -14343,7 +14622,7 @@
         <p:spPr>
           <a:xfrm>
             <a:off x="1143000" y="4076700"/>
-            <a:ext cx="1783687" cy="571500"/>
+            <a:ext cx="2685086" cy="571500"/>
           </a:xfrm>
           <a:prstGeom prst="rect">
             <a:avLst/>
@@ -14383,8 +14662,8 @@
         </p:nvSpPr>
         <p:spPr>
           <a:xfrm>
-            <a:off x="2926687" y="4076700"/>
-            <a:ext cx="14218313" cy="571500"/>
+            <a:off x="3828086" y="4076700"/>
+            <a:ext cx="13316914" cy="571500"/>
           </a:xfrm>
           <a:prstGeom prst="rect">
             <a:avLst/>
@@ -14415,8 +14694,8 @@
         </p:nvSpPr>
         <p:spPr>
           <a:xfrm>
-            <a:off x="3079087" y="4076700"/>
-            <a:ext cx="13913513" cy="571500"/>
+            <a:off x="3980486" y="4076700"/>
+            <a:ext cx="13012114" cy="571500"/>
           </a:xfrm>
           <a:prstGeom prst="rect">
             <a:avLst/>
@@ -14457,7 +14736,7 @@
         <p:spPr>
           <a:xfrm>
             <a:off x="1143000" y="4724400"/>
-            <a:ext cx="1783687" cy="571500"/>
+            <a:ext cx="2685086" cy="571500"/>
           </a:xfrm>
           <a:prstGeom prst="rect">
             <a:avLst/>
@@ -14487,7 +14766,7 @@
         <p:spPr>
           <a:xfrm>
             <a:off x="1143000" y="4724400"/>
-            <a:ext cx="1783687" cy="571500"/>
+            <a:ext cx="2685086" cy="571500"/>
           </a:xfrm>
           <a:prstGeom prst="rect">
             <a:avLst/>
@@ -14527,8 +14806,8 @@
         </p:nvSpPr>
         <p:spPr>
           <a:xfrm>
-            <a:off x="2926687" y="4724400"/>
-            <a:ext cx="14218313" cy="571500"/>
+            <a:off x="3828086" y="4724400"/>
+            <a:ext cx="13316914" cy="571500"/>
           </a:xfrm>
           <a:prstGeom prst="rect">
             <a:avLst/>
@@ -14559,8 +14838,8 @@
         </p:nvSpPr>
         <p:spPr>
           <a:xfrm>
-            <a:off x="3079087" y="4724400"/>
-            <a:ext cx="13913513" cy="571500"/>
+            <a:off x="3980486" y="4724400"/>
+            <a:ext cx="13012114" cy="571500"/>
           </a:xfrm>
           <a:prstGeom prst="rect">
             <a:avLst/>
@@ -14601,7 +14880,7 @@
         <p:spPr>
           <a:xfrm>
             <a:off x="1143000" y="5372100"/>
-            <a:ext cx="1783687" cy="571500"/>
+            <a:ext cx="2685086" cy="571500"/>
           </a:xfrm>
           <a:prstGeom prst="rect">
             <a:avLst/>
@@ -14631,7 +14910,7 @@
         <p:spPr>
           <a:xfrm>
             <a:off x="1143000" y="5372100"/>
-            <a:ext cx="1783687" cy="571500"/>
+            <a:ext cx="2685086" cy="571500"/>
           </a:xfrm>
           <a:prstGeom prst="rect">
             <a:avLst/>
@@ -14671,8 +14950,8 @@
         </p:nvSpPr>
         <p:spPr>
           <a:xfrm>
-            <a:off x="2926687" y="5372100"/>
-            <a:ext cx="14218313" cy="571500"/>
+            <a:off x="3828086" y="5372100"/>
+            <a:ext cx="13316914" cy="571500"/>
           </a:xfrm>
           <a:prstGeom prst="rect">
             <a:avLst/>
@@ -14703,8 +14982,8 @@
         </p:nvSpPr>
         <p:spPr>
           <a:xfrm>
-            <a:off x="3079087" y="5372100"/>
-            <a:ext cx="13913513" cy="571500"/>
+            <a:off x="3980486" y="5372100"/>
+            <a:ext cx="13012114" cy="571500"/>
           </a:xfrm>
           <a:prstGeom prst="rect">
             <a:avLst/>
@@ -14738,7 +15017,151 @@
       </p:sp>
       <p:sp>
         <p:nvSpPr>
-          <p:cNvPr id="28" name="TextBox 27"/>
+          <p:cNvPr id="28" name="Rectangle 27"/>
+          <p:cNvSpPr/>
+          <p:nvPr/>
+        </p:nvSpPr>
+        <p:spPr>
+          <a:xfrm>
+            <a:off x="1143000" y="6019800"/>
+            <a:ext cx="2685086" cy="571500"/>
+          </a:xfrm>
+          <a:prstGeom prst="rect">
+            <a:avLst/>
+          </a:prstGeom>
+          <a:solidFill>
+            <a:srgbClr val="0D2B5E"/>
+          </a:solidFill>
+          <a:ln>
+            <a:noFill/>
+          </a:ln>
+          <a:effectLst/>
+        </p:spPr>
+        <p:txBody>
+          <a:bodyPr rtlCol="0" anchor="ctr" wrap="square"/>
+          <a:lstStyle/>
+          <a:p>
+            <a:pPr algn="ctr"/>
+          </a:p>
+        </p:txBody>
+      </p:sp>
+      <p:sp>
+        <p:nvSpPr>
+          <p:cNvPr id="29" name="TextBox 28"/>
+          <p:cNvSpPr txBox="1"/>
+          <p:nvPr/>
+        </p:nvSpPr>
+        <p:spPr>
+          <a:xfrm>
+            <a:off x="1143000" y="6019800"/>
+            <a:ext cx="2685086" cy="571500"/>
+          </a:xfrm>
+          <a:prstGeom prst="rect">
+            <a:avLst/>
+          </a:prstGeom>
+          <a:noFill/>
+        </p:spPr>
+        <p:txBody>
+          <a:bodyPr wrap="square" lIns="0" rIns="0" tIns="0" bIns="0" anchor="ctr">
+            <a:spAutoFit/>
+          </a:bodyPr>
+          <a:lstStyle/>
+          <a:p>
+            <a:pPr algn="ctr">
+              <a:lnSpc>
+                <a:spcPct val="100000"/>
+              </a:lnSpc>
+            </a:pPr>
+            <a:r>
+              <a:rPr sz="1800" b="1">
+                <a:solidFill>
+                  <a:srgbClr val="FFFFFF"/>
+                </a:solidFill>
+                <a:latin typeface="Pretendard"/>
+                <a:ea typeface="Pretendard"/>
+                <a:cs typeface="Pretendard"/>
+              </a:rPr>
+              <a:t>ensurepip 오류(WSL2)</a:t>
+            </a:r>
+          </a:p>
+        </p:txBody>
+      </p:sp>
+      <p:sp>
+        <p:nvSpPr>
+          <p:cNvPr id="30" name="Rectangle 29"/>
+          <p:cNvSpPr/>
+          <p:nvPr/>
+        </p:nvSpPr>
+        <p:spPr>
+          <a:xfrm>
+            <a:off x="3828086" y="6019800"/>
+            <a:ext cx="13316914" cy="571500"/>
+          </a:xfrm>
+          <a:prstGeom prst="rect">
+            <a:avLst/>
+          </a:prstGeom>
+          <a:solidFill>
+            <a:srgbClr val="FAFBFD"/>
+          </a:solidFill>
+          <a:ln w="9525">
+            <a:solidFill>
+              <a:srgbClr val="DCE1E8"/>
+            </a:solidFill>
+          </a:ln>
+          <a:effectLst/>
+        </p:spPr>
+        <p:txBody>
+          <a:bodyPr rtlCol="0" anchor="ctr" wrap="square"/>
+          <a:lstStyle/>
+          <a:p>
+            <a:pPr algn="ctr"/>
+          </a:p>
+        </p:txBody>
+      </p:sp>
+      <p:sp>
+        <p:nvSpPr>
+          <p:cNvPr id="31" name="TextBox 30"/>
+          <p:cNvSpPr txBox="1"/>
+          <p:nvPr/>
+        </p:nvSpPr>
+        <p:spPr>
+          <a:xfrm>
+            <a:off x="3980486" y="6019800"/>
+            <a:ext cx="13012114" cy="571500"/>
+          </a:xfrm>
+          <a:prstGeom prst="rect">
+            <a:avLst/>
+          </a:prstGeom>
+          <a:noFill/>
+        </p:spPr>
+        <p:txBody>
+          <a:bodyPr wrap="square" lIns="0" rIns="0" tIns="0" bIns="0" anchor="ctr">
+            <a:spAutoFit/>
+          </a:bodyPr>
+          <a:lstStyle/>
+          <a:p>
+            <a:pPr algn="l">
+              <a:lnSpc>
+                <a:spcPct val="115000"/>
+              </a:lnSpc>
+            </a:pPr>
+            <a:r>
+              <a:rPr sz="1800" b="0">
+                <a:solidFill>
+                  <a:srgbClr val="3D3D3D"/>
+                </a:solidFill>
+                <a:latin typeface="Pretendard"/>
+                <a:ea typeface="Pretendard"/>
+                <a:cs typeface="Pretendard"/>
+              </a:rPr>
+              <a:t>sudo apt install -y python3-venv 뒤 다시</a:t>
+            </a:r>
+          </a:p>
+        </p:txBody>
+      </p:sp>
+      <p:sp>
+        <p:nvSpPr>
+          <p:cNvPr id="32" name="TextBox 31"/>
           <p:cNvSpPr txBox="1"/>
           <p:nvPr/>
         </p:nvSpPr>
@@ -14772,14 +15195,14 @@
                 <a:ea typeface="Pretendard"/>
                 <a:cs typeface="Pretendard"/>
               </a:rPr>
-              <a:t>9092 열림 + confluent-kafka 설치 = 6-3 준비 완료 — 호스트 파이썬은 EXTERNAL 리스너 안내를 받는다</a:t>
-            </a:r>
-          </a:p>
-        </p:txBody>
-      </p:sp>
-      <p:sp>
-        <p:nvSpPr>
-          <p:cNvPr id="29" name="Rectangle 28"/>
+              <a:t>9092 열림 + confluent-kafka 설치(실측 2.16.1, 6초) = 6-3 준비 완료 — 호스트 파이썬은 EXTERNAL 리스너로</a:t>
+            </a:r>
+          </a:p>
+        </p:txBody>
+      </p:sp>
+      <p:sp>
+        <p:nvSpPr>
+          <p:cNvPr id="33" name="Rectangle 32"/>
           <p:cNvSpPr/>
           <p:nvPr/>
         </p:nvSpPr>
@@ -14809,7 +15232,7 @@
       </p:sp>
       <p:sp>
         <p:nvSpPr>
-          <p:cNvPr id="30" name="TextBox 29"/>
+          <p:cNvPr id="34" name="TextBox 33"/>
           <p:cNvSpPr txBox="1"/>
           <p:nvPr/>
         </p:nvSpPr>
@@ -14850,7 +15273,7 @@
       </p:sp>
       <p:sp>
         <p:nvSpPr>
-          <p:cNvPr id="31" name="TextBox 30"/>
+          <p:cNvPr id="35" name="TextBox 34"/>
           <p:cNvSpPr txBox="1"/>
           <p:nvPr/>
         </p:nvSpPr>
@@ -14909,7 +15332,7 @@
       <p:grpSpPr/>
       <p:sp>
         <p:nvSpPr>
-          <p:cNvPr id="2" name="Oval 1"/>
+          <p:cNvPr id="2" name="deckgen:decor"/>
           <p:cNvSpPr/>
           <p:nvPr/>
         </p:nvSpPr>
@@ -14939,7 +15362,7 @@
       </p:sp>
       <p:sp>
         <p:nvSpPr>
-          <p:cNvPr id="3" name="Oval 2"/>
+          <p:cNvPr id="3" name="deckgen:decor"/>
           <p:cNvSpPr/>
           <p:nvPr/>
         </p:nvSpPr>
@@ -14969,7 +15392,7 @@
       </p:sp>
       <p:sp>
         <p:nvSpPr>
-          <p:cNvPr id="4" name="Oval 3"/>
+          <p:cNvPr id="4" name="deckgen:decor"/>
           <p:cNvSpPr/>
           <p:nvPr/>
         </p:nvSpPr>
@@ -15175,7 +15598,7 @@
       </p:sp>
       <p:sp>
         <p:nvSpPr>
-          <p:cNvPr id="10" name="TextBox 9"/>
+          <p:cNvPr id="10" name="deckgen:ornament"/>
           <p:cNvSpPr txBox="1"/>
           <p:nvPr/>
         </p:nvSpPr>
@@ -15360,7 +15783,7 @@
       </p:sp>
       <p:sp>
         <p:nvSpPr>
-          <p:cNvPr id="14" name="TextBox 13"/>
+          <p:cNvPr id="14" name="deckgen:ornament"/>
           <p:cNvSpPr txBox="1"/>
           <p:nvPr/>
         </p:nvSpPr>
@@ -15545,7 +15968,7 @@
       </p:sp>
       <p:sp>
         <p:nvSpPr>
-          <p:cNvPr id="18" name="TextBox 17"/>
+          <p:cNvPr id="18" name="deckgen:ornament"/>
           <p:cNvSpPr txBox="1"/>
           <p:nvPr/>
         </p:nvSpPr>
